--- a/IT002-OOP/Slide lý thuyết/1. IntroOOP.pptx
+++ b/IT002-OOP/Slide lý thuyết/1. IntroOOP.pptx
@@ -215,7 +215,7 @@
           </a:lstStyle>
           <a:p>
             <a:fld id="{77F5E20D-330D-AE4A-A6A6-1850AD2ED2D6}" type="datetimeFigureOut">
-              <a:t>5/2/26</a:t>
+              <a:t>26/2/26</a:t>
             </a:fld>
             <a:endParaRPr lang="en-VN"/>
           </a:p>
@@ -630,7 +630,7 @@
           <a:lstStyle/>
           <a:p>
             <a:fld id="{B19CC23C-BA29-DE42-B018-0A671B23AB5C}" type="datetime1">
-              <a:t>5/2/26</a:t>
+              <a:t>26/2/26</a:t>
             </a:fld>
             <a:endParaRPr lang="en-VN"/>
           </a:p>
@@ -828,7 +828,7 @@
           <a:lstStyle/>
           <a:p>
             <a:fld id="{4C98E9E1-1963-2549-A392-0CE442C818D3}" type="datetime1">
-              <a:t>5/2/26</a:t>
+              <a:t>26/2/26</a:t>
             </a:fld>
             <a:endParaRPr lang="en-VN"/>
           </a:p>
@@ -1036,7 +1036,7 @@
           <a:lstStyle/>
           <a:p>
             <a:fld id="{C7AFA920-85BE-4747-816A-47AD76A510FA}" type="datetime1">
-              <a:t>5/2/26</a:t>
+              <a:t>26/2/26</a:t>
             </a:fld>
             <a:endParaRPr lang="en-VN"/>
           </a:p>
@@ -1234,7 +1234,7 @@
           <a:lstStyle/>
           <a:p>
             <a:fld id="{AAD3D96D-7531-BC47-A011-B5D6B3D43310}" type="datetime1">
-              <a:t>5/2/26</a:t>
+              <a:t>26/2/26</a:t>
             </a:fld>
             <a:endParaRPr lang="en-VN"/>
           </a:p>
@@ -1549,7 +1549,7 @@
           <a:lstStyle/>
           <a:p>
             <a:fld id="{9099FF25-CCF5-1749-B789-DEA9DF3915D1}" type="datetime1">
-              <a:t>5/2/26</a:t>
+              <a:t>26/2/26</a:t>
             </a:fld>
             <a:endParaRPr lang="en-VN"/>
           </a:p>
@@ -1815,7 +1815,7 @@
           <a:lstStyle/>
           <a:p>
             <a:fld id="{96C9BD3F-C60C-8F40-A1AA-746E79F526C8}" type="datetime1">
-              <a:t>5/2/26</a:t>
+              <a:t>26/2/26</a:t>
             </a:fld>
             <a:endParaRPr lang="en-VN"/>
           </a:p>
@@ -2228,7 +2228,7 @@
           <a:lstStyle/>
           <a:p>
             <a:fld id="{A8563D55-6338-8241-BEA3-C8267015B326}" type="datetime1">
-              <a:t>5/2/26</a:t>
+              <a:t>26/2/26</a:t>
             </a:fld>
             <a:endParaRPr lang="en-VN"/>
           </a:p>
@@ -2368,7 +2368,7 @@
           <a:lstStyle/>
           <a:p>
             <a:fld id="{89782EF4-4D34-8E49-9BB8-7FCD8F64F56C}" type="datetime1">
-              <a:t>5/2/26</a:t>
+              <a:t>26/2/26</a:t>
             </a:fld>
             <a:endParaRPr lang="en-VN"/>
           </a:p>
@@ -2479,7 +2479,7 @@
           <a:lstStyle/>
           <a:p>
             <a:fld id="{8A835D4F-1253-B847-8798-F89DBC53ECA3}" type="datetime1">
-              <a:t>5/2/26</a:t>
+              <a:t>26/2/26</a:t>
             </a:fld>
             <a:endParaRPr lang="en-VN"/>
           </a:p>
@@ -2790,7 +2790,7 @@
           <a:lstStyle/>
           <a:p>
             <a:fld id="{7B60E56D-C72A-354F-B0FC-65EC27F745C6}" type="datetime1">
-              <a:t>5/2/26</a:t>
+              <a:t>26/2/26</a:t>
             </a:fld>
             <a:endParaRPr lang="en-VN"/>
           </a:p>
@@ -3077,7 +3077,7 @@
           <a:lstStyle/>
           <a:p>
             <a:fld id="{D4EEE616-05B3-E949-A580-BAD4E917BCA4}" type="datetime1">
-              <a:t>5/2/26</a:t>
+              <a:t>26/2/26</a:t>
             </a:fld>
             <a:endParaRPr lang="en-VN"/>
           </a:p>
@@ -3318,7 +3318,7 @@
           </a:lstStyle>
           <a:p>
             <a:fld id="{D2508FC7-06EA-184C-B437-1FD4117B159D}" type="datetime1">
-              <a:t>5/2/26</a:t>
+              <a:t>26/2/26</a:t>
             </a:fld>
             <a:endParaRPr lang="en-VN"/>
           </a:p>
@@ -9331,7 +9331,23 @@
             </a:pPr>
             <a:r>
               <a:rPr lang="en-VN"/>
-              <a:t>Demos in VSCode with clang++ &amp; CMake</a:t>
+              <a:t>Windows: Visual Studio (C++) </a:t>
+            </a:r>
+            <a:r>
+              <a:rPr lang="en-VN">
+                <a:sym typeface="Wingdings" pitchFamily="2" charset="2"/>
+              </a:rPr>
+              <a:t> </a:t>
+            </a:r>
+            <a:endParaRPr lang="en-VN"/>
+          </a:p>
+          <a:p>
+            <a:pPr marL="0" indent="0">
+              <a:buNone/>
+            </a:pPr>
+            <a:r>
+              <a:rPr lang="en-VN"/>
+              <a:t>MacOS / Linux: VSCode with clang++ &amp; CMake</a:t>
             </a:r>
           </a:p>
         </p:txBody>
@@ -12913,7 +12929,7 @@
             </a:r>
             <a:r>
               <a:rPr lang="en-VN"/>
-              <a:t> : </a:t>
+              <a:t>: </a:t>
             </a:r>
             <a:r>
               <a:rPr lang="en-US">
